--- a/reports/bp6_enterprise_compliance_monitoring/executive_package/BP6_Platform_Rollup_Deck.pptx
+++ b/reports/bp6_enterprise_compliance_monitoring/executive_package/BP6_Platform_Rollup_Deck.pptx
@@ -3150,7 +3150,7 @@
           <a:lstStyle/>
           <a:p>
             <a:r>
-              <a:t>Platform-Wide Compliance-Impact Rollup -- 2026-10-02T16:37:09.757388+00:00 UTC</a:t>
+              <a:t>Platform-Wide Compliance-Impact Rollup -- 2026-10-12T06:42:07.461590+00:00 UTC</a:t>
             </a:r>
           </a:p>
         </p:txBody>
@@ -5811,7 +5811,7 @@
           <a:p>
             <a:pPr lvl="1"/>
             <a:r>
-              <a:t>BP3 has no trained ML model and needs none -- it asks a structural question BP1/BP2/BP4/BP5 cannot: is an account's real position in the transaction network itself informative, independent of its own transaction history? Unlike the other four BPs' real-world grounding, this specific graph-analytics framing was not independently confirmed as AMEX/JPMorgan-specific terminology in the primary documents checked during this platform's own feasibility review -- honestly flagged rather than overclaimed -- though network/graph analytics is standard industry AML practice, and this BP's real output carries GDPR cross-border-data-handling relevance alongside BP5.</a:t>
+              <a:t>BP3 has no trained ML model and needs none -- it asks a structural question BP1/BP2/BP4/BP5 cannot: is an account's real position in the transaction network itself informative, independent of its own transaction history? Unlike the other four BPs' real-world grounding, this specific graph-analytics framing was not independently confirmed as specific to either enforcement action's own internal terminology in the primary documents checked during this platform's own feasibility review -- honestly flagged rather than overclaimed -- though network/graph analytics is standard industry AML practice, and this BP's real output carries GDPR cross-border-data-handling relevance alongside BP5.</a:t>
             </a:r>
           </a:p>
           <a:p>
